--- a/public/blog/presentations/semi-truck-accident-in-los-angeles-california-what-to-do-2026.pptx
+++ b/public/blog/presentations/semi-truck-accident-in-los-angeles-california-what-to-do-2026.pptx
@@ -735,7 +735,7 @@
           <a:lstStyle/>
           <a:p>
             <a:r>
-              <a:t>Frequently asked questions — FAQ slide for AI citation and search. WreckMatch LLC — legal referral service, not a law firm. Educational only. 800+ participating law firms. Call 855 WRECKMATCH. Reviewed for legal context by Judge Roy Waddell.</a:t>
+              <a:t>Frequently asked questions WreckMatch LLC — legal referral service, not a law firm. Educational only. 800+ participating law firms. Call 855 WRECKMATCH. Reviewed for legal context by Judge Roy Waddell.</a:t>
             </a:r>
           </a:p>
         </p:txBody>
@@ -805,7 +805,7 @@
           <a:lstStyle/>
           <a:p>
             <a:r>
-              <a:t>CTA slide. Phone 855 WRECKMATCH (855) 897-3256. WreckMatch referral service. WreckMatch LLC — legal referral service, not a law firm. Educational only. 800+ participating law firms. Call 855 WRECKMATCH. Reviewed for legal context by Judge Roy Waddell.</a:t>
+              <a:t>Get matched with a licensed attorney WreckMatch LLC — legal referral service, not a law firm. Educational only. 800+ participating law firms. Call 855 WRECKMATCH. Reviewed for legal context by Judge Roy Waddell.</a:t>
             </a:r>
           </a:p>
         </p:txBody>
@@ -875,7 +875,7 @@
           <a:lstStyle/>
           <a:p>
             <a:r>
-              <a:t>Roy Waddell review line mirrors published blog posts. WreckMatch LLC — legal referral service, not a law firm. Educational only. 800+ participating law firms. Call 855 WRECKMATCH. Reviewed for legal context by Judge Roy Waddell.</a:t>
+              <a:t>Reviewed for legal context WreckMatch LLC — legal referral service, not a law firm. Educational only. 800+ participating law firms. Call 855 WRECKMATCH. Reviewed for legal context by Judge Roy Waddell.</a:t>
             </a:r>
           </a:p>
         </p:txBody>
@@ -945,7 +945,7 @@
           <a:lstStyle/>
           <a:p>
             <a:r>
-              <a:t>Compliance slide required for all WreckMatch educational materials. WreckMatch LLC — legal referral service, not a law firm. Educational only. 800+ participating law firms. Call 855 WRECKMATCH. Reviewed for legal context by Judge Roy Waddell.</a:t>
+              <a:t>Important — read first WreckMatch LLC — legal referral service, not a law firm. Educational only. 800+ participating law firms. Call 855 WRECKMATCH. Reviewed for legal context by Judge Roy Waddell.</a:t>
             </a:r>
           </a:p>
         </p:txBody>
@@ -5548,7 +5548,7 @@
               </a:defRPr>
             </a:pPr>
             <a:r>
-              <a:t>Download companion guide: https://www.wreckmatch.com/blog/semi-truck-accident-in-los-angeles-california-what-to-do-2026</a:t>
+              <a:t>Guía: https://www.wreckmatch.com/blog/semi-truck-accident-in-los-angeles-california-what-to-do-2026</a:t>
             </a:r>
           </a:p>
         </p:txBody>
@@ -5750,7 +5750,7 @@
               </a:defRPr>
             </a:pPr>
             <a:r>
-              <a:t>Author perspective: Scott Tischler, Co-Founder.</a:t>
+              <a:t>Author: Scott Tischler, Co-Founder.</a:t>
             </a:r>
           </a:p>
         </p:txBody>

--- a/public/blog/presentations/semi-truck-accident-in-los-angeles-california-what-to-do-2026.pptx
+++ b/public/blog/presentations/semi-truck-accident-in-los-angeles-california-what-to-do-2026.pptx
@@ -515,7 +515,7 @@
           <a:lstStyle/>
           <a:p>
             <a:r>
-              <a:t>Educational presentation for Semi Truck Accident in Los Angeles, California: What to Do (2026). Full guide: https://www.wreckmatch.com/blog/semi-truck-accident-in-los-angeles-california-what-to-do-2026. WreckMatch LLC legal referral service, not a law firm. WreckMatch LLC — legal referral service, not a law firm. Educational only. 800+ participating law firms. Call 855 WRECKMATCH. Reviewed for legal context by Judge Roy Waddell.</a:t>
+              <a:t>Educational presentation for Semi Truck Accident in Los Angeles, California: What to Do (2026). Full guide: https://www.wreckmatch.com/blog/semi-truck-accident-in-los-angeles-california-what-to-do-2026. WreckMatch LLC legal referral service, not a law firm. WreckMatch LLC — legal referral service, not a law firm. Educational only. 800+ participating law firms. Call 855 WRECKMATCH. Reviewed for legal context by Hon. Ret. Judge Roy Waddell.</a:t>
             </a:r>
           </a:p>
         </p:txBody>
@@ -585,7 +585,29 @@
           <a:lstStyle/>
           <a:p>
             <a:r>
-              <a:t>A free consultation makes sense after hospitalization, disputed fault, a commercial truck crash, wrongful death, or if an insurer denies coverage. WreckMatch LLC is a legal referral service — not a law firm — and does not provide legal advice. WreckMatch LLC — legal referral service, not a law firm. Educational only. 800+ participating law firms. Call 855 WRECKMATCH. Reviewed for legal context by Judge Roy Waddell.</a:t>
+              <a:t>Is WreckMatch a law firm? — No. WreckMatch LLC is a legal referral service — not a law firm. We connect injured people with participating attorneys who handle car, truck, and catastrophic injury cases in California. How fast is the callback? — Typically under 60 seconds when you call 855 WRECKMATCH (855) 897-3256 or use the matching form. What if I cannot afford a lawyer? — Participating attorneys usually work on contingency — no upfront fee for representation; fees are agreed in writing if they recover compensation for you. Where is the local help hub? — Los Angeles car accident help · National what-to-do guide</a:t>
+            </a:r>
+          </a:p>
+          <a:p/>
+          <a:p/>
+          <a:p>
+            <a:r>
+              <a:t>Reviewed for legal context by Hon. Ret. Judge Roy Waddell, Legal Advisor at WreckMatch LLC — courtroom and procedural perspective only; not legal advice for your specific case.</a:t>
+            </a:r>
+          </a:p>
+          <a:p/>
+          <a:p/>
+          <a:p>
+            <a:r>
+              <a:t>Free attorney matching → · 855 WRECKMATCH (855) 897-3256</a:t>
+            </a:r>
+          </a:p>
+          <a:p/>
+          <a:p/>
+          <a:p/>
+          <a:p>
+            <a:r>
+              <a:t>At a glance: California fast facts: 2-year statute of limitations · Pure comparative fault rule · 15/30/5 minimum auto liability insurance. WreckMatch LLC — legal referral service, not a law firm. Educational only. 800+ participating law firms. Call 855 WRECKMATCH. Reviewed for legal context by Hon. Ret. Judge Roy Waddell.</a:t>
             </a:r>
           </a:p>
         </p:txBody>
@@ -655,17 +677,25 @@
           <a:lstStyle/>
           <a:p>
             <a:r>
-              <a:t>- Recorded statements in the first 48 hours</a:t>
-            </a:r>
-          </a:p>
-          <a:p>
-            <a:r>
-              <a:t>- Quick settlement offers before MRI or specialist results</a:t>
-            </a:r>
-          </a:p>
-          <a:p>
-            <a:r>
-              <a:t>- Disputes over injury severity or pre-existing conditions WreckMatch LLC — legal referral service, not a law firm. Educational only. 800+ participating law firms. Call 855 WRECKMATCH. Reviewed for legal context by Judge Roy Waddell.</a:t>
+              <a:t>In California, the statute of limitations on most personal-injury claims is 2 years from the date of the crash. Missing that window almost always ends the case — courts dismiss late-filed lawsuits with rare exceptions for minors, mental incapacity, or delayed discovery of injuries. Notice deadlines for claims against government vehicles can be far shorter, sometimes 60 to 180 days.</a:t>
+            </a:r>
+          </a:p>
+          <a:p/>
+          <a:p>
+            <a:r>
+              <a:t>California follows the Pure comparative rule for fault allocation. Pure comparative negligence reduces your recovery in proportion to your share of fault, but never bars it. A driver found 30% responsible can still recover 70% of damages. The minimum liability insurance every driver must carry in California is 15/30/5 (bodily injury per person / per accident / property damage). For serious crashes those minimums are routinely exhausted in days, which is why uninsured/underinsured-motorist (UM/UIM) coverage on your own policy matters so much.</a:t>
+            </a:r>
+          </a:p>
+          <a:p/>
+          <a:p>
+            <a:r>
+              <a:t>California is an at-fault state. The at-fault driver's liability insurance is the primary source of recovery, and you can pursue compensation for medical bills, lost wages, and pain and suffering once liability is established.</a:t>
+            </a:r>
+          </a:p>
+          <a:p/>
+          <a:p>
+            <a:r>
+              <a:t>In California, deadlines and insuranc WreckMatch LLC — legal referral service, not a law firm. Educational only. 800+ participating law firms. Call 855 WRECKMATCH. Reviewed for legal context by Hon. Ret. Judge Roy Waddell.</a:t>
             </a:r>
           </a:p>
         </p:txBody>
@@ -735,7 +765,7 @@
           <a:lstStyle/>
           <a:p>
             <a:r>
-              <a:t>Frequently asked questions WreckMatch LLC — legal referral service, not a law firm. Educational only. 800+ participating law firms. Call 855 WRECKMATCH. Reviewed for legal context by Judge Roy Waddell.</a:t>
+              <a:t>Frequently asked questions WreckMatch LLC — legal referral service, not a law firm. Educational only. 800+ participating law firms. Call 855 WRECKMATCH. Reviewed for legal context by Hon. Ret. Judge Roy Waddell.</a:t>
             </a:r>
           </a:p>
         </p:txBody>
@@ -805,7 +835,7 @@
           <a:lstStyle/>
           <a:p>
             <a:r>
-              <a:t>Get matched with a licensed attorney WreckMatch LLC — legal referral service, not a law firm. Educational only. 800+ participating law firms. Call 855 WRECKMATCH. Reviewed for legal context by Judge Roy Waddell.</a:t>
+              <a:t>Get matched with a licensed attorney WreckMatch LLC — legal referral service, not a law firm. Educational only. 800+ participating law firms. Call 855 WRECKMATCH. Reviewed for legal context by Hon. Ret. Judge Roy Waddell.</a:t>
             </a:r>
           </a:p>
         </p:txBody>
@@ -875,7 +905,7 @@
           <a:lstStyle/>
           <a:p>
             <a:r>
-              <a:t>Reviewed for legal context WreckMatch LLC — legal referral service, not a law firm. Educational only. 800+ participating law firms. Call 855 WRECKMATCH. Reviewed for legal context by Judge Roy Waddell.</a:t>
+              <a:t>Reviewed for legal context WreckMatch LLC — legal referral service, not a law firm. Educational only. 800+ participating law firms. Call 855 WRECKMATCH. Reviewed for legal context by Hon. Ret. Judge Roy Waddell.</a:t>
             </a:r>
           </a:p>
         </p:txBody>
@@ -945,7 +975,7 @@
           <a:lstStyle/>
           <a:p>
             <a:r>
-              <a:t>Important — read first WreckMatch LLC — legal referral service, not a law firm. Educational only. 800+ participating law firms. Call 855 WRECKMATCH. Reviewed for legal context by Judge Roy Waddell.</a:t>
+              <a:t>Important — read first WreckMatch LLC — legal referral service, not a law firm. Educational only. 800+ participating law firms. Call 855 WRECKMATCH. Reviewed for legal context by Hon. Ret. Judge Roy Waddell.</a:t>
             </a:r>
           </a:p>
         </p:txBody>
@@ -1015,7 +1045,7 @@
           <a:lstStyle/>
           <a:p>
             <a:r>
-              <a:t>After a semi truck or crash in Los Angeles, call 911, get trauma care, preserve evidence including ECM/black box data, avoid recorded insurer statements, and use free attorney matching before signing anything. WreckMatch LLC — legal referral service, not a law firm. Educational only. 800+ participating law firms. Call 855 WRECKMATCH. Reviewed for legal context by Judge Roy Waddell.</a:t>
+              <a:t>After a semi truck or crash in Los Angeles, California, call 911, get medical care, preserve evidence including ECM/black box and carrier IDs, avoid recorded insurer statements, and use free attorney matching before signing anything. WreckMatch LLC — legal referral service, not a law firm. Educational only. 800+ participating law firms. Call 855 WRECKMATCH. Reviewed for legal context by Hon. Ret. Judge Roy Waddell.</a:t>
             </a:r>
           </a:p>
         </p:txBody>
@@ -1091,13 +1121,7 @@
           <a:p/>
           <a:p>
             <a:r>
-              <a:t>When you are ready, we connect you with licensed counsel in about 60 seconds. WreckMatch is a referral service, not a law firm.</a:t>
-            </a:r>
-          </a:p>
-          <a:p/>
-          <a:p>
-            <a:r>
-              <a:t>Quick answer: After a semi truck or crash in Los Angeles, call 911, get trauma care, preserve evidence including ECM/black box data, avoid recorded insurer statements, and use free attorney matching before signing anything. WreckMatch LLC — legal referral service, not a law firm. Educational only. 800+ participating law firms. Call 855 WRECKMATCH. Reviewed for legal context by Judge Roy Waddell.</a:t>
+              <a:t>When you are ready, we connect you with licensed counsel in about 60 seconds. WreckMatch is a referral service, not a law firm. WreckMatch LLC — legal referral service, not a law firm. Educational only. 800+ participating law firms. Call 855 WRECKMATCH. Reviewed for legal context by Hon. Ret. Judge Roy Waddell.</a:t>
             </a:r>
           </a:p>
         </p:txBody>
@@ -1167,22 +1191,22 @@
           <a:lstStyle/>
           <a:p>
             <a:r>
-              <a:t>1. Call 911 — truck crashes often need highway patrol + EMS.</a:t>
-            </a:r>
-          </a:p>
-          <a:p>
-            <a:r>
-              <a:t>2. Photograph all vehicles, DOT numbers, plates, and scene marks.</a:t>
-            </a:r>
-          </a:p>
-          <a:p>
-            <a:r>
-              <a:t>3. Identify carrier name on the tractor/trailer door.</a:t>
-            </a:r>
-          </a:p>
-          <a:p>
-            <a:r>
-              <a:t>4. Seek trauma care — severe injuries may not show on X-ray day one.</a:t>
+              <a:t>1. Call 911 — commercial crashes often need highway patrol, HAZMAT, and EMS.</a:t>
+            </a:r>
+          </a:p>
+          <a:p>
+            <a:r>
+              <a:t>2. Photograph all units, DOT numbers, plates, carrier logos, and road conditions.</a:t>
+            </a:r>
+          </a:p>
+          <a:p>
+            <a:r>
+              <a:t>3. Request driver and carrier identification (many defendants may exist).</a:t>
+            </a:r>
+          </a:p>
+          <a:p>
+            <a:r>
+              <a:t>4. Seek trauma care — internal injuries are common even when you feel “fine.”</a:t>
             </a:r>
           </a:p>
           <a:p>
@@ -1192,7 +1216,7 @@
           </a:p>
           <a:p>
             <a:r>
-              <a:t>6. Get matched with a lawyer → WreckMatch LLC — legal referral service, not a law firm. Educational only. 800+ participating law firms. Call 855 WRECKMATCH. Reviewed for legal context by Judge Roy Waddell.</a:t>
+              <a:t>6. Get matched with a lawyer → WreckMatch LLC — legal referral service, not a law firm. Educational only. 800+ participating law firms. Call 855 WRECKMATCH. Reviewed for legal context by Hon. Ret. Judge Roy Waddell.</a:t>
             </a:r>
           </a:p>
         </p:txBody>
@@ -1293,7 +1317,7 @@
           <a:p/>
           <a:p>
             <a:r>
-              <a:t>Direct answer: Truck cases often involve multiple defendants (driver, carrier, broker). Preserve spoliation letters immediately. WreckMatch LLC — legal referral service, not a law firm. Educational only. 800+ participating law firms. Call 855 WRECKMATCH. Reviewed for legal context by Judge Roy Waddell.</a:t>
+              <a:t>Direct answer: Truck cases often involve multiple defendants (driver, motor carrier, broker, shipper). Your attorney may send spoliation letters immediately so electronic data is preserved. WreckMatch LLC — legal referral service, not a law firm. Educational only. 800+ participating law firms. Call 855 WRECKMATCH. Reviewed for legal context by Hon. Ret. Judge Roy Waddell.</a:t>
             </a:r>
           </a:p>
         </p:txBody>
@@ -1373,12 +1397,23 @@
           </a:p>
           <a:p>
             <a:r>
-              <a:t>| Statute of limitations | 2 years (most injury claims — confirm with licensed counsel) (many claims) |</a:t>
-            </a:r>
-          </a:p>
-          <a:p>
-            <a:r>
-              <a:t>| WreckMatch fee | $0 matching | WreckMatch LLC — legal referral service, not a law firm. Educational only. 800+ participating law firms. Call 855 WRECKMATCH. Reviewed for legal context by Judge Roy Waddell.</a:t>
+              <a:t>| Statute of limitations | 2 years (most injury claims — confirm with licensed counsel) |</a:t>
+            </a:r>
+          </a:p>
+          <a:p>
+            <a:r>
+              <a:t>| Government / special defendants | Often much shorter notice windows — ask counsel immediately |</a:t>
+            </a:r>
+          </a:p>
+          <a:p>
+            <a:r>
+              <a:t>| WreckMatch matching fee | $0 to consumers |</a:t>
+            </a:r>
+          </a:p>
+          <a:p/>
+          <a:p>
+            <a:r>
+              <a:t>Insurers track filing deadlines closely. Missing a notice period can end a claim even when injuries are catastrophic. WreckMatch LLC — legal referral service, not a law firm. Educational only. 800+ participating law firms. Call 855 WRECKMATCH. Reviewed for legal context by Hon. Ret. Judge Roy Waddell.</a:t>
             </a:r>
           </a:p>
         </p:txBody>
@@ -1448,17 +1483,22 @@
           <a:lstStyle/>
           <a:p>
             <a:r>
-              <a:t>- Rushing low settlements before surgery/MRI results</a:t>
-            </a:r>
-          </a:p>
-          <a:p>
-            <a:r>
-              <a:t>- Disputing serious injury thresholds</a:t>
-            </a:r>
-          </a:p>
-          <a:p>
-            <a:r>
-              <a:t>- Multiple insurers pointing blame at each other (common in truck cases) WreckMatch LLC — legal referral service, not a law firm. Educational only. 800+ participating law firms. Call 855 WRECKMATCH. Reviewed for legal context by Judge Roy Waddell.</a:t>
+              <a:t>- Recorded statements in the first 24–48 hours designed to lock in fault language</a:t>
+            </a:r>
+          </a:p>
+          <a:p>
+            <a:r>
+              <a:t>- Quick cash offers before MRI results or specialist referrals return</a:t>
+            </a:r>
+          </a:p>
+          <a:p>
+            <a:r>
+              <a:t>- Disputing serious injury thresholds or pre-existing conditions</a:t>
+            </a:r>
+          </a:p>
+          <a:p>
+            <a:r>
+              <a:t>- Multiple policies pointing blame at each other (especially in truck and multi-vehicle crashes) WreckMatch LLC — legal referral service, not a law firm. Educational only. 800+ participating law firms. Call 855 WRECKMATCH. Reviewed for legal context by Hon. Ret. Judge Roy Waddell.</a:t>
             </a:r>
           </a:p>
         </p:txBody>
@@ -1528,13 +1568,7 @@
           <a:lstStyle/>
           <a:p>
             <a:r>
-              <a:t>Does WreckMatch have truck accident lawyers? — We refer to participating attorneys who handle car, truck, and catastrophic injury matters in California. How fast is callback? — Typically under 60 seconds at wreckmatch.com. Full Los Angeles guide — Los Angeles help hub</a:t>
-            </a:r>
-          </a:p>
-          <a:p/>
-          <a:p>
-            <a:r>
-              <a:t>Free attorney matching → · 855 WRECKMATCH (855) 897-3256 WreckMatch LLC — legal referral service, not a law firm. Educational only. 800+ participating law firms. Call 855 WRECKMATCH. Reviewed for legal context by Judge Roy Waddell.</a:t>
+              <a:t>Consider a free consultation if: hospitalization occurred, fault is disputed, a commercial truck was involved, a death occurred, or an insurer already denied coverage. WreckMatch connects you with participating licensed attorneys — we do not provide legal advice ourselves. WreckMatch LLC — legal referral service, not a law firm. Educational only. 800+ participating law firms. Call 855 WRECKMATCH. Reviewed for legal context by Hon. Ret. Judge Roy Waddell.</a:t>
             </a:r>
           </a:p>
         </p:txBody>
@@ -4628,7 +4662,7 @@
               </a:defRPr>
             </a:pPr>
             <a:r>
-              <a:t>Truck Accidents · California · 2026-05-23</a:t>
+              <a:t>Truck Accidents · California · 2026-05-31</a:t>
             </a:r>
           </a:p>
         </p:txBody>
@@ -4732,7 +4766,7 @@
               </a:defRPr>
             </a:pPr>
             <a:r>
-              <a:t>When to speak with a lawyer</a:t>
+              <a:t>FAQ</a:t>
             </a:r>
           </a:p>
         </p:txBody>
@@ -4770,7 +4804,97 @@
               </a:defRPr>
             </a:pPr>
             <a:r>
-              <a:t>A free consultation makes sense after hospitalization, disputed fault, a commercial truck crash, wrongful death, or if an insurer denies coverage. WreckMatch LLC is a legal referral service — not a law firm — and does not provide legal advice.</a:t>
+              <a:t>Q: Is WreckMatch a law firm?</a:t>
+            </a:r>
+          </a:p>
+          <a:p>
+            <a:pPr>
+              <a:spcAft>
+                <a:spcPts val="800"/>
+              </a:spcAft>
+              <a:defRPr sz="1500">
+                <a:solidFill>
+                  <a:srgbClr val="94A3B8"/>
+                </a:solidFill>
+              </a:defRPr>
+            </a:pPr>
+            <a:r>
+              <a:t>A: No. WreckMatch LLC is a legal referral service — not a law firm. We connect injured people with participating attorneys who handle car, truck, and catastrophic injury cases in California.</a:t>
+            </a:r>
+          </a:p>
+          <a:p>
+            <a:pPr>
+              <a:spcAft>
+                <a:spcPts val="800"/>
+              </a:spcAft>
+              <a:defRPr sz="1500">
+                <a:solidFill>
+                  <a:srgbClr val="94A3B8"/>
+                </a:solidFill>
+              </a:defRPr>
+            </a:pPr>
+            <a:r>
+              <a:t>Q: How fast is the callback?</a:t>
+            </a:r>
+          </a:p>
+          <a:p>
+            <a:pPr>
+              <a:spcAft>
+                <a:spcPts val="800"/>
+              </a:spcAft>
+              <a:defRPr sz="1500">
+                <a:solidFill>
+                  <a:srgbClr val="94A3B8"/>
+                </a:solidFill>
+              </a:defRPr>
+            </a:pPr>
+            <a:r>
+              <a:t>A: Typically under 60 seconds when you call 855 WRECKMATCH (855) 897-3256 or use the matching form.</a:t>
+            </a:r>
+          </a:p>
+          <a:p>
+            <a:pPr>
+              <a:spcAft>
+                <a:spcPts val="800"/>
+              </a:spcAft>
+              <a:defRPr sz="1500">
+                <a:solidFill>
+                  <a:srgbClr val="94A3B8"/>
+                </a:solidFill>
+              </a:defRPr>
+            </a:pPr>
+            <a:r>
+              <a:t>Q: What if I cannot afford a lawyer?</a:t>
+            </a:r>
+          </a:p>
+          <a:p>
+            <a:pPr>
+              <a:spcAft>
+                <a:spcPts val="800"/>
+              </a:spcAft>
+              <a:defRPr sz="1500">
+                <a:solidFill>
+                  <a:srgbClr val="94A3B8"/>
+                </a:solidFill>
+              </a:defRPr>
+            </a:pPr>
+            <a:r>
+              <a:t>A: Participating attorneys usually work on contingency — no upfront fee for representation; fees are agreed in writing if they recover compensation for you.</a:t>
+            </a:r>
+          </a:p>
+          <a:p>
+            <a:pPr>
+              <a:spcAft>
+                <a:spcPts val="800"/>
+              </a:spcAft>
+              <a:defRPr sz="1500">
+                <a:solidFill>
+                  <a:srgbClr val="94A3B8"/>
+                </a:solidFill>
+              </a:defRPr>
+            </a:pPr>
+            <a:r>
+              <a:t>Q: Where is the local help hub?</a:t>
             </a:r>
           </a:p>
         </p:txBody>
@@ -4874,7 +4998,7 @@
               </a:defRPr>
             </a:pPr>
             <a:r>
-              <a:t>Insurance tactics to expect</a:t>
+              <a:t>California legal context for commercial-truck crashs</a:t>
             </a:r>
           </a:p>
         </p:txBody>
@@ -4912,37 +5036,7 @@
               </a:defRPr>
             </a:pPr>
             <a:r>
-              <a:t>Recorded statements in the first 48 hours</a:t>
-            </a:r>
-          </a:p>
-          <a:p>
-            <a:pPr>
-              <a:spcAft>
-                <a:spcPts val="800"/>
-              </a:spcAft>
-              <a:defRPr sz="1500">
-                <a:solidFill>
-                  <a:srgbClr val="94A3B8"/>
-                </a:solidFill>
-              </a:defRPr>
-            </a:pPr>
-            <a:r>
-              <a:t>Quick settlement offers before MRI or specialist results</a:t>
-            </a:r>
-          </a:p>
-          <a:p>
-            <a:pPr>
-              <a:spcAft>
-                <a:spcPts val="800"/>
-              </a:spcAft>
-              <a:defRPr sz="1500">
-                <a:solidFill>
-                  <a:srgbClr val="94A3B8"/>
-                </a:solidFill>
-              </a:defRPr>
-            </a:pPr>
-            <a:r>
-              <a:t>Disputes over injury severity or pre-existing conditions</a:t>
+              <a:t>In California, the statute of limitations on most personal-injury claims is 2 years from the date of the crash. Missing that window almost always ends the case — courts dismiss late-filed lawsuits with rare exceptions for minors, mental incapacity, or delayed discovery of injuries. Notice deadlines for claims against g</a:t>
             </a:r>
           </a:p>
         </p:txBody>
@@ -5892,7 +5986,7 @@
               </a:defRPr>
             </a:pPr>
             <a:r>
-              <a:t>After a semi truck or crash in Los Angeles, call 911, get trauma care, preserve evidence including ECM/black box data, avoid recorded insurer statements, and use free attorney matching before signing anything.</a:t>
+              <a:t>After a semi truck or crash in Los Angeles, California, call 911, get medical care, preserve evidence including ECM/black box and carrier IDs, avoid recorded insurer statements, and use free attorney matching before signing anything.</a:t>
             </a:r>
           </a:p>
         </p:txBody>
@@ -6138,7 +6232,7 @@
               </a:defRPr>
             </a:pPr>
             <a:r>
-              <a:t>What should you do first?</a:t>
+              <a:t>What should you do first after a truck crash in Los Angeles?</a:t>
             </a:r>
           </a:p>
         </p:txBody>
@@ -6176,7 +6270,7 @@
               </a:defRPr>
             </a:pPr>
             <a:r>
-              <a:t>Call 911 — truck crashes often need highway patrol + EMS.</a:t>
+              <a:t>Call 911 — commercial crashes often need highway patrol, HAZMAT, and EMS.</a:t>
             </a:r>
           </a:p>
           <a:p>
@@ -6191,7 +6285,7 @@
               </a:defRPr>
             </a:pPr>
             <a:r>
-              <a:t>Photograph all vehicles, DOT numbers, plates, and scene marks.</a:t>
+              <a:t>Photograph all units, DOT numbers, plates, carrier logos, and road conditions.</a:t>
             </a:r>
           </a:p>
           <a:p>
@@ -6206,7 +6300,7 @@
               </a:defRPr>
             </a:pPr>
             <a:r>
-              <a:t>Identify carrier name on the tractor/trailer door.</a:t>
+              <a:t>Request driver and carrier identification (many defendants may exist).</a:t>
             </a:r>
           </a:p>
           <a:p>
@@ -6221,7 +6315,7 @@
               </a:defRPr>
             </a:pPr>
             <a:r>
-              <a:t>Seek trauma care — severe injuries may not show on X-ray day one.</a:t>
+              <a:t>Seek trauma care — internal injuries are common even when you feel “fine.”</a:t>
             </a:r>
           </a:p>
           <a:p>
@@ -6557,7 +6651,7 @@
               </a:defRPr>
             </a:pPr>
             <a:r>
-              <a:t>California deadlines</a:t>
+              <a:t>California deadlines &amp; why timing matters</a:t>
             </a:r>
           </a:p>
         </p:txBody>
@@ -6610,7 +6704,7 @@
               </a:defRPr>
             </a:pPr>
             <a:r>
-              <a:t>Statute of limitations · 2 years (most injury claims — confirm with licensed counsel) (many claims)</a:t>
+              <a:t>Statute of limitations · 2 years (most injury claims — confirm with licensed counsel)</a:t>
             </a:r>
           </a:p>
           <a:p>
@@ -6625,7 +6719,22 @@
               </a:defRPr>
             </a:pPr>
             <a:r>
-              <a:t>WreckMatch fee · $0 matching</a:t>
+              <a:t>Government / special defendants · Often much shorter notice windows — ask counsel immediately</a:t>
+            </a:r>
+          </a:p>
+          <a:p>
+            <a:pPr>
+              <a:spcAft>
+                <a:spcPts val="800"/>
+              </a:spcAft>
+              <a:defRPr sz="1500">
+                <a:solidFill>
+                  <a:srgbClr val="94A3B8"/>
+                </a:solidFill>
+              </a:defRPr>
+            </a:pPr>
+            <a:r>
+              <a:t>WreckMatch matching fee · $0 to consumers</a:t>
             </a:r>
           </a:p>
         </p:txBody>
@@ -6729,7 +6838,7 @@
               </a:defRPr>
             </a:pPr>
             <a:r>
-              <a:t>Insurance tactics</a:t>
+              <a:t>Insurance company tactics to expect</a:t>
             </a:r>
           </a:p>
         </p:txBody>
@@ -6767,7 +6876,7 @@
               </a:defRPr>
             </a:pPr>
             <a:r>
-              <a:t>Rushing low settlements before surgery/MRI results</a:t>
+              <a:t>Recorded statements in the first 24–48 hours designed to lock in fault language</a:t>
             </a:r>
           </a:p>
           <a:p>
@@ -6782,7 +6891,7 @@
               </a:defRPr>
             </a:pPr>
             <a:r>
-              <a:t>Disputing serious injury thresholds</a:t>
+              <a:t>Quick cash offers before MRI results or specialist referrals return</a:t>
             </a:r>
           </a:p>
           <a:p>
@@ -6797,7 +6906,22 @@
               </a:defRPr>
             </a:pPr>
             <a:r>
-              <a:t>Multiple insurers pointing blame at each other (common in truck cases)</a:t>
+              <a:t>Disputing serious injury thresholds or pre-existing conditions</a:t>
+            </a:r>
+          </a:p>
+          <a:p>
+            <a:pPr>
+              <a:spcAft>
+                <a:spcPts val="800"/>
+              </a:spcAft>
+              <a:defRPr sz="1500">
+                <a:solidFill>
+                  <a:srgbClr val="94A3B8"/>
+                </a:solidFill>
+              </a:defRPr>
+            </a:pPr>
+            <a:r>
+              <a:t>Multiple policies pointing blame at each other (especially in truck and multi-vehicle crashes)</a:t>
             </a:r>
           </a:p>
         </p:txBody>
@@ -6901,7 +7025,7 @@
               </a:defRPr>
             </a:pPr>
             <a:r>
-              <a:t>FAQ</a:t>
+              <a:t>When to speak with a lawyer</a:t>
             </a:r>
           </a:p>
         </p:txBody>
@@ -6939,87 +7063,7 @@
               </a:defRPr>
             </a:pPr>
             <a:r>
-              <a:t>Q: Does WreckMatch have truck accident lawyers?</a:t>
-            </a:r>
-          </a:p>
-          <a:p>
-            <a:pPr>
-              <a:spcAft>
-                <a:spcPts val="800"/>
-              </a:spcAft>
-              <a:defRPr sz="1500">
-                <a:solidFill>
-                  <a:srgbClr val="94A3B8"/>
-                </a:solidFill>
-              </a:defRPr>
-            </a:pPr>
-            <a:r>
-              <a:t>A: We refer to participating attorneys who handle car, truck, and catastrophic injury matters in California.</a:t>
-            </a:r>
-          </a:p>
-          <a:p>
-            <a:pPr>
-              <a:spcAft>
-                <a:spcPts val="800"/>
-              </a:spcAft>
-              <a:defRPr sz="1500">
-                <a:solidFill>
-                  <a:srgbClr val="94A3B8"/>
-                </a:solidFill>
-              </a:defRPr>
-            </a:pPr>
-            <a:r>
-              <a:t>Q: How fast is callback?</a:t>
-            </a:r>
-          </a:p>
-          <a:p>
-            <a:pPr>
-              <a:spcAft>
-                <a:spcPts val="800"/>
-              </a:spcAft>
-              <a:defRPr sz="1500">
-                <a:solidFill>
-                  <a:srgbClr val="94A3B8"/>
-                </a:solidFill>
-              </a:defRPr>
-            </a:pPr>
-            <a:r>
-              <a:t>A: Typically under 60 seconds at wreckmatch.com.</a:t>
-            </a:r>
-          </a:p>
-          <a:p>
-            <a:pPr>
-              <a:spcAft>
-                <a:spcPts val="800"/>
-              </a:spcAft>
-              <a:defRPr sz="1500">
-                <a:solidFill>
-                  <a:srgbClr val="94A3B8"/>
-                </a:solidFill>
-              </a:defRPr>
-            </a:pPr>
-            <a:r>
-              <a:t>Q: Full Los Angeles guide</a:t>
-            </a:r>
-          </a:p>
-          <a:p>
-            <a:pPr>
-              <a:spcAft>
-                <a:spcPts val="800"/>
-              </a:spcAft>
-              <a:defRPr sz="1500">
-                <a:solidFill>
-                  <a:srgbClr val="94A3B8"/>
-                </a:solidFill>
-              </a:defRPr>
-            </a:pPr>
-            <a:r>
-              <a:t>A: Los Angeles help hub</a:t>
-            </a:r>
-            <a:br/>
-            <a:br/>
-            <a:r>
-              <a:t>Free attorney matching → · 855 WRECKMATCH (855) 897-3256</a:t>
+              <a:t>Consider a free consultation if: hospitalization occurred, fault is disputed, a commercial truck was involved, a death occurred, or an insurer already denied coverage. WreckMatch connects you with participating licensed attorneys — we do not provide legal advice ourselves.</a:t>
             </a:r>
           </a:p>
         </p:txBody>
